--- a/sales-dojo/docs/商談ロープレ道場_初回利用ガイド.pptx
+++ b/sales-dojo/docs/商談ロープレ道場_初回利用ガイド.pptx
@@ -11,6 +11,8 @@
     <p:sldId id="259" r:id="rId10"/>
     <p:sldId id="260" r:id="rId11"/>
     <p:sldId id="261" r:id="rId12"/>
+    <p:sldId id="262" r:id="rId13"/>
+    <p:sldId id="263" r:id="rId14"/>
   </p:sldIdLst>
   <p:sldSz cx="12191695" cy="6858000" type="screen4x3"/>
   <p:notesSz cx="6858000" cy="9144000"/>
@@ -3109,8 +3111,8 @@
         </p:nvSpPr>
         <p:spPr>
           <a:xfrm>
-            <a:off x="914400" y="1920240"/>
-            <a:ext cx="10332720" cy="1097280"/>
+            <a:off x="731520" y="2103120"/>
+            <a:ext cx="7315200" cy="1097280"/>
           </a:xfrm>
           <a:prstGeom prst="rect">
             <a:avLst/>
@@ -3123,8 +3125,8 @@
           </a:bodyPr>
           <a:lstStyle/>
           <a:p>
-            <a:pPr algn="ctr">
-              <a:defRPr sz="5400" b="1">
+            <a:pPr algn="l">
+              <a:defRPr sz="5200" b="1">
                 <a:solidFill>
                   <a:srgbClr val="FFFFFF"/>
                 </a:solidFill>
@@ -3145,8 +3147,8 @@
         </p:nvSpPr>
         <p:spPr>
           <a:xfrm>
-            <a:off x="914400" y="3108960"/>
-            <a:ext cx="10332720" cy="731520"/>
+            <a:off x="731520" y="3200400"/>
+            <a:ext cx="7315200" cy="731520"/>
           </a:xfrm>
           <a:prstGeom prst="rect">
             <a:avLst/>
@@ -3159,8 +3161,8 @@
           </a:bodyPr>
           <a:lstStyle/>
           <a:p>
-            <a:pPr algn="ctr">
-              <a:defRPr sz="2400" b="1">
+            <a:pPr algn="l">
+              <a:defRPr sz="2200" b="1">
                 <a:solidFill>
                   <a:srgbClr val="FF7A3C"/>
                 </a:solidFill>
@@ -3168,7 +3170,7 @@
               </a:defRPr>
             </a:pPr>
             <a:r>
-              <a:t>— 医用機器営業のための音声ロールプレイング練習アプリ —</a:t>
+              <a:t>医用機器営業のための音声ロールプレイング練習アプリ</a:t>
             </a:r>
           </a:p>
         </p:txBody>
@@ -3181,8 +3183,8 @@
         </p:nvSpPr>
         <p:spPr>
           <a:xfrm>
-            <a:off x="914400" y="4206240"/>
-            <a:ext cx="10332720" cy="914400"/>
+            <a:off x="731520" y="4206240"/>
+            <a:ext cx="7315200" cy="1188720"/>
           </a:xfrm>
           <a:prstGeom prst="rect">
             <a:avLst/>
@@ -3195,7 +3197,7 @@
           </a:bodyPr>
           <a:lstStyle/>
           <a:p>
-            <a:pPr algn="ctr">
+            <a:pPr algn="l">
               <a:defRPr sz="1800" b="0">
                 <a:solidFill>
                   <a:srgbClr val="FFFFFF"/>
@@ -3208,7 +3210,7 @@
             </a:r>
           </a:p>
           <a:p>
-            <a:pPr algn="ctr">
+            <a:pPr algn="l">
               <a:defRPr sz="1800" b="0">
                 <a:solidFill>
                   <a:srgbClr val="FFFFFF"/>
@@ -3217,11 +3219,48 @@
               </a:defRPr>
             </a:pPr>
             <a:r>
-              <a:t>URLをクリックするだけ。ログイン不要・iPhoneでもWindows PCでも。</a:t>
-            </a:r>
-          </a:p>
-        </p:txBody>
-      </p:sp>
+              <a:t>URLをクリックするだけ。ログイン不要。</a:t>
+            </a:r>
+          </a:p>
+          <a:p>
+            <a:pPr algn="l">
+              <a:defRPr sz="1800" b="0">
+                <a:solidFill>
+                  <a:srgbClr val="FFFFFF"/>
+                </a:solidFill>
+                <a:latin typeface="Meiryo"/>
+              </a:defRPr>
+            </a:pPr>
+            <a:r>
+              <a:t>iPhoneでもWindows PCでも使えます。</a:t>
+            </a:r>
+          </a:p>
+        </p:txBody>
+      </p:sp>
+      <p:pic>
+        <p:nvPicPr>
+          <p:cNvPr id="5" name="Picture 4" descr="1-home.png"/>
+          <p:cNvPicPr>
+            <a:picLocks noChangeAspect="1"/>
+          </p:cNvPicPr>
+          <p:nvPr/>
+        </p:nvPicPr>
+        <p:blipFill>
+          <a:blip r:embed="rId2"/>
+          <a:stretch>
+            <a:fillRect/>
+          </a:stretch>
+        </p:blipFill>
+        <p:spPr>
+          <a:xfrm>
+            <a:off x="8778240" y="594360"/>
+            <a:ext cx="2619691" cy="5669280"/>
+          </a:xfrm>
+          <a:prstGeom prst="rect">
+            <a:avLst/>
+          </a:prstGeom>
+        </p:spPr>
+      </p:pic>
     </p:spTree>
   </p:cSld>
   <p:clrMapOvr>
@@ -3271,7 +3310,7 @@
           <a:lstStyle/>
           <a:p>
             <a:pPr algn="l">
-              <a:defRPr sz="3200" b="1">
+              <a:defRPr sz="3000" b="1">
                 <a:solidFill>
                   <a:srgbClr val="16305C"/>
                 </a:solidFill>
@@ -3292,7 +3331,7 @@
         </p:nvSpPr>
         <p:spPr>
           <a:xfrm>
-            <a:off x="640080" y="1371600"/>
+            <a:off x="640080" y="1280160"/>
             <a:ext cx="10972800" cy="914400"/>
           </a:xfrm>
           <a:prstGeom prst="rect">
@@ -3307,7 +3346,7 @@
           <a:lstStyle/>
           <a:p>
             <a:pPr algn="l">
-              <a:defRPr sz="2000" b="0">
+              <a:defRPr sz="1900" b="0">
                 <a:solidFill>
                   <a:srgbClr val="22314F"/>
                 </a:solidFill>
@@ -3320,7 +3359,7 @@
           </a:p>
           <a:p>
             <a:pPr algn="l">
-              <a:defRPr sz="2000" b="0">
+              <a:defRPr sz="1900" b="0">
                 <a:solidFill>
                   <a:srgbClr val="22314F"/>
                 </a:solidFill>
@@ -3378,7 +3417,7 @@
         <p:spPr>
           <a:xfrm>
             <a:off x="640080" y="3383280"/>
-            <a:ext cx="3566160" cy="2011680"/>
+            <a:ext cx="3566160" cy="1828800"/>
           </a:xfrm>
           <a:prstGeom prst="rect">
             <a:avLst/>
@@ -3400,7 +3439,7 @@
               </a:defRPr>
             </a:pPr>
             <a:r>
-              <a:t>大掛かりなロープレ大会は不要。明日の商談前に、スキマ時間でサッと1本。</a:t>
+              <a:t>大掛かりなロープレ大会は不要。明日の商談前にスキマ時間でサッと1本。</a:t>
             </a:r>
           </a:p>
         </p:txBody>
@@ -3450,7 +3489,7 @@
         <p:spPr>
           <a:xfrm>
             <a:off x="4480560" y="3383280"/>
-            <a:ext cx="3566160" cy="2011680"/>
+            <a:ext cx="3566160" cy="1828800"/>
           </a:xfrm>
           <a:prstGeom prst="rect">
             <a:avLst/>
@@ -3472,7 +3511,7 @@
               </a:defRPr>
             </a:pPr>
             <a:r>
-              <a:t>商談を丸ごとやらず、オープニング／ヒアリング／製品説明／価格提示／クロージングに分割。</a:t>
+              <a:t>オープニング／ヒアリング／製品説明／価格提示／クロージングに分割して練習。</a:t>
             </a:r>
           </a:p>
         </p:txBody>
@@ -3522,7 +3561,7 @@
         <p:spPr>
           <a:xfrm>
             <a:off x="8321040" y="3383280"/>
-            <a:ext cx="3566160" cy="2011680"/>
+            <a:ext cx="3566160" cy="1828800"/>
           </a:xfrm>
           <a:prstGeom prst="rect">
             <a:avLst/>
@@ -3544,7 +3583,7 @@
               </a:defRPr>
             </a:pPr>
             <a:r>
-              <a:t>1回のロープレで評価するテーマは1つ。あれこれ言われず、確実に1歩ずつ上達。</a:t>
+              <a:t>1回のロープレで評価するテーマは1つ。確実に1歩ずつ上達。</a:t>
             </a:r>
           </a:p>
         </p:txBody>
@@ -3557,7 +3596,7 @@
         </p:nvSpPr>
         <p:spPr>
           <a:xfrm>
-            <a:off x="640080" y="5760720"/>
+            <a:off x="640080" y="5669280"/>
             <a:ext cx="10972800" cy="640080"/>
           </a:xfrm>
           <a:prstGeom prst="rect">
@@ -3619,8 +3658,8 @@
         </p:nvSpPr>
         <p:spPr>
           <a:xfrm>
-            <a:off x="640080" y="365760"/>
-            <a:ext cx="10972800" cy="822960"/>
+            <a:off x="457200" y="274320"/>
+            <a:ext cx="11247120" cy="640080"/>
           </a:xfrm>
           <a:prstGeom prst="rect">
             <a:avLst/>
@@ -3634,7 +3673,7 @@
           <a:lstStyle/>
           <a:p>
             <a:pPr algn="l">
-              <a:defRPr sz="3200" b="1">
+              <a:defRPr sz="2800" b="1">
                 <a:solidFill>
                   <a:srgbClr val="16305C"/>
                 </a:solidFill>
@@ -3642,21 +3681,69 @@
               </a:defRPr>
             </a:pPr>
             <a:r>
-              <a:t>対戦相手：山田事務長(AI)</a:t>
-            </a:r>
-          </a:p>
-        </p:txBody>
-      </p:sp>
-      <p:sp>
-        <p:nvSpPr>
-          <p:cNvPr id="3" name="TextBox 2"/>
+              <a:t>STEP 1・2　シーンと「今日の事務長」を選ぶ</a:t>
+            </a:r>
+          </a:p>
+        </p:txBody>
+      </p:sp>
+      <p:pic>
+        <p:nvPicPr>
+          <p:cNvPr id="3" name="Picture 2" descr="1-home.png"/>
+          <p:cNvPicPr>
+            <a:picLocks noChangeAspect="1"/>
+          </p:cNvPicPr>
+          <p:nvPr/>
+        </p:nvPicPr>
+        <p:blipFill>
+          <a:blip r:embed="rId2"/>
+          <a:stretch>
+            <a:fillRect/>
+          </a:stretch>
+        </p:blipFill>
+        <p:spPr>
+          <a:xfrm>
+            <a:off x="822960" y="868680"/>
+            <a:ext cx="2619691" cy="5669280"/>
+          </a:xfrm>
+          <a:prstGeom prst="rect">
+            <a:avLst/>
+          </a:prstGeom>
+        </p:spPr>
+      </p:pic>
+      <p:pic>
+        <p:nvPicPr>
+          <p:cNvPr id="4" name="Picture 3" descr="2-mode.png"/>
+          <p:cNvPicPr>
+            <a:picLocks noChangeAspect="1"/>
+          </p:cNvPicPr>
+          <p:nvPr/>
+        </p:nvPicPr>
+        <p:blipFill>
+          <a:blip r:embed="rId3"/>
+          <a:stretch>
+            <a:fillRect/>
+          </a:stretch>
+        </p:blipFill>
+        <p:spPr>
+          <a:xfrm>
+            <a:off x="4206240" y="868680"/>
+            <a:ext cx="2619691" cy="5669280"/>
+          </a:xfrm>
+          <a:prstGeom prst="rect">
+            <a:avLst/>
+          </a:prstGeom>
+        </p:spPr>
+      </p:pic>
+      <p:sp>
+        <p:nvSpPr>
+          <p:cNvPr id="5" name="TextBox 4"/>
           <p:cNvSpPr txBox="1"/>
           <p:nvPr/>
         </p:nvSpPr>
         <p:spPr>
           <a:xfrm>
-            <a:off x="640080" y="1280160"/>
-            <a:ext cx="10972800" cy="1097280"/>
+            <a:off x="7772400" y="1188720"/>
+            <a:ext cx="4023360" cy="548640"/>
           </a:xfrm>
           <a:prstGeom prst="rect">
             <a:avLst/>
@@ -3670,42 +3757,29 @@
           <a:lstStyle/>
           <a:p>
             <a:pPr algn="l">
-              <a:defRPr sz="1800" b="0">
-                <a:solidFill>
-                  <a:srgbClr val="22314F"/>
-                </a:solidFill>
-                <a:latin typeface="Meiryo"/>
-              </a:defRPr>
-            </a:pPr>
-            <a:r>
-              <a:t>医療従事者ではないので、専門用語(DICOM・被ばく線量など)は通じません。</a:t>
-            </a:r>
-          </a:p>
-          <a:p>
-            <a:pPr algn="l">
-              <a:defRPr sz="1800" b="0">
-                <a:solidFill>
-                  <a:srgbClr val="22314F"/>
-                </a:solidFill>
-                <a:latin typeface="Meiryo"/>
-              </a:defRPr>
-            </a:pPr>
-            <a:r>
-              <a:t>使うと必ず「それって何ですか？」と聞き返されます。関心は経営面(コスト・差別化・運用負担)だけ。</a:t>
-            </a:r>
-          </a:p>
-        </p:txBody>
-      </p:sp>
-      <p:sp>
-        <p:nvSpPr>
-          <p:cNvPr id="4" name="TextBox 3"/>
+              <a:defRPr sz="2000" b="1">
+                <a:solidFill>
+                  <a:srgbClr val="FF7A3C"/>
+                </a:solidFill>
+                <a:latin typeface="Meiryo"/>
+              </a:defRPr>
+            </a:pPr>
+            <a:r>
+              <a:t>① シーンを選ぶ</a:t>
+            </a:r>
+          </a:p>
+        </p:txBody>
+      </p:sp>
+      <p:sp>
+        <p:nvSpPr>
+          <p:cNvPr id="6" name="TextBox 5"/>
           <p:cNvSpPr txBox="1"/>
           <p:nvPr/>
         </p:nvSpPr>
         <p:spPr>
           <a:xfrm>
-            <a:off x="640080" y="2651760"/>
-            <a:ext cx="10972800" cy="502920"/>
+            <a:off x="7772400" y="1737360"/>
+            <a:ext cx="4023360" cy="1280160"/>
           </a:xfrm>
           <a:prstGeom prst="rect">
             <a:avLst/>
@@ -3719,29 +3793,29 @@
           <a:lstStyle/>
           <a:p>
             <a:pPr algn="l">
-              <a:defRPr sz="1900" b="1">
-                <a:solidFill>
-                  <a:srgbClr val="FF7A3C"/>
-                </a:solidFill>
-                <a:latin typeface="Meiryo"/>
-              </a:defRPr>
-            </a:pPr>
-            <a:r>
-              <a:t>😊 モードA やさしい事務長</a:t>
-            </a:r>
-          </a:p>
-        </p:txBody>
-      </p:sp>
-      <p:sp>
-        <p:nvSpPr>
-          <p:cNvPr id="5" name="TextBox 4"/>
+              <a:defRPr sz="1400" b="0">
+                <a:solidFill>
+                  <a:srgbClr val="22314F"/>
+                </a:solidFill>
+                <a:latin typeface="Meiryo"/>
+              </a:defRPr>
+            </a:pPr>
+            <a:r>
+              <a:t>5つの商談シーンから1つ。トップには通算回数・連続日数・自己ベストが表示されます。</a:t>
+            </a:r>
+          </a:p>
+        </p:txBody>
+      </p:sp>
+      <p:sp>
+        <p:nvSpPr>
+          <p:cNvPr id="7" name="TextBox 6"/>
           <p:cNvSpPr txBox="1"/>
           <p:nvPr/>
         </p:nvSpPr>
         <p:spPr>
           <a:xfrm>
-            <a:off x="914400" y="3154680"/>
-            <a:ext cx="10607040" cy="731520"/>
+            <a:off x="7772400" y="3108960"/>
+            <a:ext cx="4023360" cy="548640"/>
           </a:xfrm>
           <a:prstGeom prst="rect">
             <a:avLst/>
@@ -3755,29 +3829,29 @@
           <a:lstStyle/>
           <a:p>
             <a:pPr algn="l">
-              <a:defRPr sz="1500" b="0">
-                <a:solidFill>
-                  <a:srgbClr val="64738F"/>
-                </a:solidFill>
-                <a:latin typeface="Meiryo"/>
-              </a:defRPr>
-            </a:pPr>
-            <a:r>
-              <a:t>最後まで聞いて相槌。わからないことは素直に質問してくれる。初心者はここから。</a:t>
-            </a:r>
-          </a:p>
-        </p:txBody>
-      </p:sp>
-      <p:sp>
-        <p:nvSpPr>
-          <p:cNvPr id="6" name="TextBox 5"/>
+              <a:defRPr sz="2000" b="1">
+                <a:solidFill>
+                  <a:srgbClr val="FF7A3C"/>
+                </a:solidFill>
+                <a:latin typeface="Meiryo"/>
+              </a:defRPr>
+            </a:pPr>
+            <a:r>
+              <a:t>② 事務長モードを選ぶ</a:t>
+            </a:r>
+          </a:p>
+        </p:txBody>
+      </p:sp>
+      <p:sp>
+        <p:nvSpPr>
+          <p:cNvPr id="8" name="TextBox 7"/>
           <p:cNvSpPr txBox="1"/>
           <p:nvPr/>
         </p:nvSpPr>
         <p:spPr>
           <a:xfrm>
-            <a:off x="640080" y="3886200"/>
-            <a:ext cx="10972800" cy="502920"/>
+            <a:off x="7772400" y="3657600"/>
+            <a:ext cx="4023360" cy="2377440"/>
           </a:xfrm>
           <a:prstGeom prst="rect">
             <a:avLst/>
@@ -3791,159 +3865,41 @@
           <a:lstStyle/>
           <a:p>
             <a:pPr algn="l">
-              <a:defRPr sz="1900" b="1">
-                <a:solidFill>
-                  <a:srgbClr val="FF7A3C"/>
-                </a:solidFill>
-                <a:latin typeface="Meiryo"/>
-              </a:defRPr>
-            </a:pPr>
-            <a:r>
-              <a:t>😐 モードB 普通の事務長</a:t>
-            </a:r>
-          </a:p>
-        </p:txBody>
-      </p:sp>
-      <p:sp>
-        <p:nvSpPr>
-          <p:cNvPr id="7" name="TextBox 6"/>
-          <p:cNvSpPr txBox="1"/>
-          <p:nvPr/>
-        </p:nvSpPr>
-        <p:spPr>
-          <a:xfrm>
-            <a:off x="914400" y="4389120"/>
-            <a:ext cx="10607040" cy="731520"/>
-          </a:xfrm>
-          <a:prstGeom prst="rect">
-            <a:avLst/>
-          </a:prstGeom>
-          <a:noFill/>
-        </p:spPr>
-        <p:txBody>
-          <a:bodyPr wrap="square">
-            <a:spAutoFit/>
-          </a:bodyPr>
-          <a:lstStyle/>
-          <a:p>
-            <a:pPr algn="l">
-              <a:defRPr sz="1500" b="0">
-                <a:solidFill>
-                  <a:srgbClr val="64738F"/>
-                </a:solidFill>
-                <a:latin typeface="Meiryo"/>
-              </a:defRPr>
-            </a:pPr>
-            <a:r>
-              <a:t>淡々と必要事項を確認。わかりにくい説明には1回だけ「もう少し簡単に言うと？」。</a:t>
-            </a:r>
-          </a:p>
-        </p:txBody>
-      </p:sp>
-      <p:sp>
-        <p:nvSpPr>
-          <p:cNvPr id="8" name="TextBox 7"/>
-          <p:cNvSpPr txBox="1"/>
-          <p:nvPr/>
-        </p:nvSpPr>
-        <p:spPr>
-          <a:xfrm>
-            <a:off x="640080" y="5120640"/>
-            <a:ext cx="10972800" cy="502920"/>
-          </a:xfrm>
-          <a:prstGeom prst="rect">
-            <a:avLst/>
-          </a:prstGeom>
-          <a:noFill/>
-        </p:spPr>
-        <p:txBody>
-          <a:bodyPr wrap="square">
-            <a:spAutoFit/>
-          </a:bodyPr>
-          <a:lstStyle/>
-          <a:p>
-            <a:pPr algn="l">
-              <a:defRPr sz="1900" b="1">
-                <a:solidFill>
-                  <a:srgbClr val="FF7A3C"/>
-                </a:solidFill>
-                <a:latin typeface="Meiryo"/>
-              </a:defRPr>
-            </a:pPr>
-            <a:r>
-              <a:t>😠 モードC 忙しくて怖い事務長</a:t>
-            </a:r>
-          </a:p>
-        </p:txBody>
-      </p:sp>
-      <p:sp>
-        <p:nvSpPr>
-          <p:cNvPr id="9" name="TextBox 8"/>
-          <p:cNvSpPr txBox="1"/>
-          <p:nvPr/>
-        </p:nvSpPr>
-        <p:spPr>
-          <a:xfrm>
-            <a:off x="914400" y="5623560"/>
-            <a:ext cx="10607040" cy="731520"/>
-          </a:xfrm>
-          <a:prstGeom prst="rect">
-            <a:avLst/>
-          </a:prstGeom>
-          <a:noFill/>
-        </p:spPr>
-        <p:txBody>
-          <a:bodyPr wrap="square">
-            <a:spAutoFit/>
-          </a:bodyPr>
-          <a:lstStyle/>
-          <a:p>
-            <a:pPr algn="l">
-              <a:defRPr sz="1500" b="0">
-                <a:solidFill>
-                  <a:srgbClr val="64738F"/>
-                </a:solidFill>
-                <a:latin typeface="Meiryo"/>
-              </a:defRPr>
-            </a:pPr>
-            <a:r>
-              <a:t>「5分しかない」。前置きが長いと遮られ、値引きを迫られ、歯切れが悪いと商談打ち切りも。</a:t>
-            </a:r>
-          </a:p>
-        </p:txBody>
-      </p:sp>
-      <p:sp>
-        <p:nvSpPr>
-          <p:cNvPr id="10" name="TextBox 9"/>
-          <p:cNvSpPr txBox="1"/>
-          <p:nvPr/>
-        </p:nvSpPr>
-        <p:spPr>
-          <a:xfrm>
-            <a:off x="640080" y="6309360"/>
-            <a:ext cx="10972800" cy="457200"/>
-          </a:xfrm>
-          <a:prstGeom prst="rect">
-            <a:avLst/>
-          </a:prstGeom>
-          <a:noFill/>
-        </p:spPr>
-        <p:txBody>
-          <a:bodyPr wrap="square">
-            <a:spAutoFit/>
-          </a:bodyPr>
-          <a:lstStyle/>
-          <a:p>
-            <a:pPr algn="l">
-              <a:defRPr sz="1500" b="1">
-                <a:solidFill>
-                  <a:srgbClr val="16305C"/>
-                </a:solidFill>
-                <a:latin typeface="Meiryo"/>
-              </a:defRPr>
-            </a:pPr>
-            <a:r>
-              <a:t>※あなたの会社は業界No.2。値引きはできません。価格以外の価値で切り返しましょう。</a:t>
+              <a:defRPr sz="1400" b="0">
+                <a:solidFill>
+                  <a:srgbClr val="22314F"/>
+                </a:solidFill>
+                <a:latin typeface="Meiryo"/>
+              </a:defRPr>
+            </a:pPr>
+            <a:r>
+              <a:t>😊 やさしい: 最後まで聞いてくれる。初心者向け</a:t>
+            </a:r>
+          </a:p>
+          <a:p>
+            <a:pPr algn="l">
+              <a:defRPr sz="1400" b="0">
+                <a:solidFill>
+                  <a:srgbClr val="22314F"/>
+                </a:solidFill>
+                <a:latin typeface="Meiryo"/>
+              </a:defRPr>
+            </a:pPr>
+            <a:r>
+              <a:t>😐 普通: 淡々と確認。わかりにくいと聞き返される</a:t>
+            </a:r>
+          </a:p>
+          <a:p>
+            <a:pPr algn="l">
+              <a:defRPr sz="1400" b="0">
+                <a:solidFill>
+                  <a:srgbClr val="22314F"/>
+                </a:solidFill>
+                <a:latin typeface="Meiryo"/>
+              </a:defRPr>
+            </a:pPr>
+            <a:r>
+              <a:t>😠 忙しくて怖い: 「5分しかない」。前置きが長いと遮られ、歯切れが悪いと商談打ち切りも</a:t>
             </a:r>
           </a:p>
         </p:txBody>
@@ -3982,8 +3938,8 @@
         </p:nvSpPr>
         <p:spPr>
           <a:xfrm>
-            <a:off x="640080" y="365760"/>
-            <a:ext cx="10972800" cy="822960"/>
+            <a:off x="457200" y="274320"/>
+            <a:ext cx="11247120" cy="640080"/>
           </a:xfrm>
           <a:prstGeom prst="rect">
             <a:avLst/>
@@ -3997,7 +3953,7 @@
           <a:lstStyle/>
           <a:p>
             <a:pPr algn="l">
-              <a:defRPr sz="3200" b="1">
+              <a:defRPr sz="2800" b="1">
                 <a:solidFill>
                   <a:srgbClr val="16305C"/>
                 </a:solidFill>
@@ -4005,28 +3961,74 @@
               </a:defRPr>
             </a:pPr>
             <a:r>
-              <a:t>使い方は4ステップ + 結果</a:t>
-            </a:r>
-          </a:p>
-        </p:txBody>
-      </p:sp>
-      <p:sp>
-        <p:nvSpPr>
-          <p:cNvPr id="3" name="TextBox 2"/>
+              <a:t>STEP 3・4　評価テーマを1つ選び、時間を決めて開始</a:t>
+            </a:r>
+          </a:p>
+        </p:txBody>
+      </p:sp>
+      <p:pic>
+        <p:nvPicPr>
+          <p:cNvPr id="3" name="Picture 2" descr="3-theme.png"/>
+          <p:cNvPicPr>
+            <a:picLocks noChangeAspect="1"/>
+          </p:cNvPicPr>
+          <p:nvPr/>
+        </p:nvPicPr>
+        <p:blipFill>
+          <a:blip r:embed="rId2"/>
+          <a:stretch>
+            <a:fillRect/>
+          </a:stretch>
+        </p:blipFill>
+        <p:spPr>
+          <a:xfrm>
+            <a:off x="822960" y="868680"/>
+            <a:ext cx="2619691" cy="5669280"/>
+          </a:xfrm>
+          <a:prstGeom prst="rect">
+            <a:avLst/>
+          </a:prstGeom>
+        </p:spPr>
+      </p:pic>
+      <p:pic>
+        <p:nvPicPr>
+          <p:cNvPr id="4" name="Picture 3" descr="4-prep.png"/>
+          <p:cNvPicPr>
+            <a:picLocks noChangeAspect="1"/>
+          </p:cNvPicPr>
+          <p:nvPr/>
+        </p:nvPicPr>
+        <p:blipFill>
+          <a:blip r:embed="rId3"/>
+          <a:stretch>
+            <a:fillRect/>
+          </a:stretch>
+        </p:blipFill>
+        <p:spPr>
+          <a:xfrm>
+            <a:off x="4206240" y="868680"/>
+            <a:ext cx="2619691" cy="5669280"/>
+          </a:xfrm>
+          <a:prstGeom prst="rect">
+            <a:avLst/>
+          </a:prstGeom>
+        </p:spPr>
+      </p:pic>
+      <p:sp>
+        <p:nvSpPr>
+          <p:cNvPr id="5" name="TextBox 4"/>
           <p:cNvSpPr txBox="1"/>
           <p:nvPr/>
         </p:nvSpPr>
         <p:spPr>
           <a:xfrm>
-            <a:off x="640080" y="1371600"/>
-            <a:ext cx="1463040" cy="548640"/>
-          </a:xfrm>
-          <a:prstGeom prst="rect">
-            <a:avLst/>
-          </a:prstGeom>
-          <a:solidFill>
-            <a:srgbClr val="16305C"/>
-          </a:solidFill>
+            <a:off x="7772400" y="1188720"/>
+            <a:ext cx="4023360" cy="548640"/>
+          </a:xfrm>
+          <a:prstGeom prst="rect">
+            <a:avLst/>
+          </a:prstGeom>
+          <a:noFill/>
         </p:spPr>
         <p:txBody>
           <a:bodyPr wrap="square">
@@ -4034,30 +4036,30 @@
           </a:bodyPr>
           <a:lstStyle/>
           <a:p>
-            <a:pPr algn="ctr">
-              <a:defRPr sz="1800" b="1">
-                <a:solidFill>
-                  <a:srgbClr val="FFFFFF"/>
-                </a:solidFill>
-                <a:latin typeface="Meiryo"/>
-              </a:defRPr>
-            </a:pPr>
-            <a:r>
-              <a:t>STEP 1</a:t>
-            </a:r>
-          </a:p>
-        </p:txBody>
-      </p:sp>
-      <p:sp>
-        <p:nvSpPr>
-          <p:cNvPr id="4" name="TextBox 3"/>
+            <a:pPr algn="l">
+              <a:defRPr sz="2000" b="1">
+                <a:solidFill>
+                  <a:srgbClr val="FF7A3C"/>
+                </a:solidFill>
+                <a:latin typeface="Meiryo"/>
+              </a:defRPr>
+            </a:pPr>
+            <a:r>
+              <a:t>③ 評価テーマを1つ選ぶ</a:t>
+            </a:r>
+          </a:p>
+        </p:txBody>
+      </p:sp>
+      <p:sp>
+        <p:nvSpPr>
+          <p:cNvPr id="6" name="TextBox 5"/>
           <p:cNvSpPr txBox="1"/>
           <p:nvPr/>
         </p:nvSpPr>
         <p:spPr>
           <a:xfrm>
-            <a:off x="2286000" y="1371600"/>
-            <a:ext cx="3291840" cy="548640"/>
+            <a:off x="7772400" y="1737360"/>
+            <a:ext cx="4023360" cy="1645920"/>
           </a:xfrm>
           <a:prstGeom prst="rect">
             <a:avLst/>
@@ -4071,7 +4073,7 @@
           <a:lstStyle/>
           <a:p>
             <a:pPr algn="l">
-              <a:defRPr sz="1900" b="1">
+              <a:defRPr sz="1400" b="0">
                 <a:solidFill>
                   <a:srgbClr val="22314F"/>
                 </a:solidFill>
@@ -4079,21 +4081,21 @@
               </a:defRPr>
             </a:pPr>
             <a:r>
-              <a:t>シーンを選ぶ</a:t>
-            </a:r>
-          </a:p>
-        </p:txBody>
-      </p:sp>
-      <p:sp>
-        <p:nvSpPr>
-          <p:cNvPr id="5" name="TextBox 4"/>
+              <a:t>専門用語を使わない／値引きに価値で切り返す／結論から簡潔に／質問の意図を汲む、の4つから今日鍛えるテーマを1つだけ。</a:t>
+            </a:r>
+          </a:p>
+        </p:txBody>
+      </p:sp>
+      <p:sp>
+        <p:nvSpPr>
+          <p:cNvPr id="7" name="TextBox 6"/>
           <p:cNvSpPr txBox="1"/>
           <p:nvPr/>
         </p:nvSpPr>
         <p:spPr>
           <a:xfrm>
-            <a:off x="5669280" y="1371600"/>
-            <a:ext cx="5943600" cy="822960"/>
+            <a:off x="7772400" y="3566160"/>
+            <a:ext cx="4023360" cy="548640"/>
           </a:xfrm>
           <a:prstGeom prst="rect">
             <a:avLst/>
@@ -4107,36 +4109,34 @@
           <a:lstStyle/>
           <a:p>
             <a:pPr algn="l">
-              <a:defRPr sz="1400" b="0">
-                <a:solidFill>
-                  <a:srgbClr val="64738F"/>
-                </a:solidFill>
-                <a:latin typeface="Meiryo"/>
-              </a:defRPr>
-            </a:pPr>
-            <a:r>
-              <a:t>オープニング／ヒアリング／製品説明／価格提示／クロージング</a:t>
-            </a:r>
-          </a:p>
-        </p:txBody>
-      </p:sp>
-      <p:sp>
-        <p:nvSpPr>
-          <p:cNvPr id="6" name="TextBox 5"/>
+              <a:defRPr sz="2000" b="1">
+                <a:solidFill>
+                  <a:srgbClr val="FF7A3C"/>
+                </a:solidFill>
+                <a:latin typeface="Meiryo"/>
+              </a:defRPr>
+            </a:pPr>
+            <a:r>
+              <a:t>④ 時間を選んで開始</a:t>
+            </a:r>
+          </a:p>
+        </p:txBody>
+      </p:sp>
+      <p:sp>
+        <p:nvSpPr>
+          <p:cNvPr id="8" name="TextBox 7"/>
           <p:cNvSpPr txBox="1"/>
           <p:nvPr/>
         </p:nvSpPr>
         <p:spPr>
           <a:xfrm>
-            <a:off x="640080" y="2395728"/>
-            <a:ext cx="1463040" cy="548640"/>
-          </a:xfrm>
-          <a:prstGeom prst="rect">
-            <a:avLst/>
-          </a:prstGeom>
-          <a:solidFill>
-            <a:srgbClr val="16305C"/>
-          </a:solidFill>
+            <a:off x="7772400" y="4114800"/>
+            <a:ext cx="4023360" cy="1920240"/>
+          </a:xfrm>
+          <a:prstGeom prst="rect">
+            <a:avLst/>
+          </a:prstGeom>
+          <a:noFill/>
         </p:spPr>
         <p:txBody>
           <a:bodyPr wrap="square">
@@ -4144,44 +4144,8 @@
           </a:bodyPr>
           <a:lstStyle/>
           <a:p>
-            <a:pPr algn="ctr">
-              <a:defRPr sz="1800" b="1">
-                <a:solidFill>
-                  <a:srgbClr val="FFFFFF"/>
-                </a:solidFill>
-                <a:latin typeface="Meiryo"/>
-              </a:defRPr>
-            </a:pPr>
-            <a:r>
-              <a:t>STEP 2</a:t>
-            </a:r>
-          </a:p>
-        </p:txBody>
-      </p:sp>
-      <p:sp>
-        <p:nvSpPr>
-          <p:cNvPr id="7" name="TextBox 6"/>
-          <p:cNvSpPr txBox="1"/>
-          <p:nvPr/>
-        </p:nvSpPr>
-        <p:spPr>
-          <a:xfrm>
-            <a:off x="2286000" y="2395728"/>
-            <a:ext cx="3291840" cy="548640"/>
-          </a:xfrm>
-          <a:prstGeom prst="rect">
-            <a:avLst/>
-          </a:prstGeom>
-          <a:noFill/>
-        </p:spPr>
-        <p:txBody>
-          <a:bodyPr wrap="square">
-            <a:spAutoFit/>
-          </a:bodyPr>
-          <a:lstStyle/>
-          <a:p>
-            <a:pPr algn="l">
-              <a:defRPr sz="1900" b="1">
+            <a:pPr algn="l">
+              <a:defRPr sz="1400" b="0">
                 <a:solidFill>
                   <a:srgbClr val="22314F"/>
                 </a:solidFill>
@@ -4189,373 +4153,20 @@
               </a:defRPr>
             </a:pPr>
             <a:r>
-              <a:t>事務長モードを選ぶ</a:t>
-            </a:r>
-          </a:p>
-        </p:txBody>
-      </p:sp>
-      <p:sp>
-        <p:nvSpPr>
-          <p:cNvPr id="8" name="TextBox 7"/>
-          <p:cNvSpPr txBox="1"/>
-          <p:nvPr/>
-        </p:nvSpPr>
-        <p:spPr>
-          <a:xfrm>
-            <a:off x="5669280" y="2395728"/>
-            <a:ext cx="5943600" cy="822960"/>
-          </a:xfrm>
-          <a:prstGeom prst="rect">
-            <a:avLst/>
-          </a:prstGeom>
-          <a:noFill/>
-        </p:spPr>
-        <p:txBody>
-          <a:bodyPr wrap="square">
-            <a:spAutoFit/>
-          </a:bodyPr>
-          <a:lstStyle/>
+              <a:t>5〜20分から選択。開始前に「今日のコツ」が表示されます。</a:t>
+            </a:r>
+          </a:p>
           <a:p>
             <a:pPr algn="l">
               <a:defRPr sz="1400" b="0">
                 <a:solidFill>
-                  <a:srgbClr val="64738F"/>
-                </a:solidFill>
-                <a:latin typeface="Meiryo"/>
-              </a:defRPr>
-            </a:pPr>
-            <a:r>
-              <a:t>やさしい／普通／忙しくて怖い</a:t>
-            </a:r>
-          </a:p>
-        </p:txBody>
-      </p:sp>
-      <p:sp>
-        <p:nvSpPr>
-          <p:cNvPr id="9" name="TextBox 8"/>
-          <p:cNvSpPr txBox="1"/>
-          <p:nvPr/>
-        </p:nvSpPr>
-        <p:spPr>
-          <a:xfrm>
-            <a:off x="640080" y="3419856"/>
-            <a:ext cx="1463040" cy="548640"/>
-          </a:xfrm>
-          <a:prstGeom prst="rect">
-            <a:avLst/>
-          </a:prstGeom>
-          <a:solidFill>
-            <a:srgbClr val="16305C"/>
-          </a:solidFill>
-        </p:spPr>
-        <p:txBody>
-          <a:bodyPr wrap="square">
-            <a:spAutoFit/>
-          </a:bodyPr>
-          <a:lstStyle/>
-          <a:p>
-            <a:pPr algn="ctr">
-              <a:defRPr sz="1800" b="1">
-                <a:solidFill>
-                  <a:srgbClr val="FFFFFF"/>
-                </a:solidFill>
-                <a:latin typeface="Meiryo"/>
-              </a:defRPr>
-            </a:pPr>
-            <a:r>
-              <a:t>STEP 3</a:t>
-            </a:r>
-          </a:p>
-        </p:txBody>
-      </p:sp>
-      <p:sp>
-        <p:nvSpPr>
-          <p:cNvPr id="10" name="TextBox 9"/>
-          <p:cNvSpPr txBox="1"/>
-          <p:nvPr/>
-        </p:nvSpPr>
-        <p:spPr>
-          <a:xfrm>
-            <a:off x="2286000" y="3419856"/>
-            <a:ext cx="3291840" cy="548640"/>
-          </a:xfrm>
-          <a:prstGeom prst="rect">
-            <a:avLst/>
-          </a:prstGeom>
-          <a:noFill/>
-        </p:spPr>
-        <p:txBody>
-          <a:bodyPr wrap="square">
-            <a:spAutoFit/>
-          </a:bodyPr>
-          <a:lstStyle/>
-          <a:p>
-            <a:pPr algn="l">
-              <a:defRPr sz="1900" b="1">
-                <a:solidFill>
                   <a:srgbClr val="22314F"/>
                 </a:solidFill>
                 <a:latin typeface="Meiryo"/>
               </a:defRPr>
             </a:pPr>
             <a:r>
-              <a:t>評価テーマを1つ選ぶ</a:t>
-            </a:r>
-          </a:p>
-        </p:txBody>
-      </p:sp>
-      <p:sp>
-        <p:nvSpPr>
-          <p:cNvPr id="11" name="TextBox 10"/>
-          <p:cNvSpPr txBox="1"/>
-          <p:nvPr/>
-        </p:nvSpPr>
-        <p:spPr>
-          <a:xfrm>
-            <a:off x="5669280" y="3419856"/>
-            <a:ext cx="5943600" cy="822960"/>
-          </a:xfrm>
-          <a:prstGeom prst="rect">
-            <a:avLst/>
-          </a:prstGeom>
-          <a:noFill/>
-        </p:spPr>
-        <p:txBody>
-          <a:bodyPr wrap="square">
-            <a:spAutoFit/>
-          </a:bodyPr>
-          <a:lstStyle/>
-          <a:p>
-            <a:pPr algn="l">
-              <a:defRPr sz="1400" b="0">
-                <a:solidFill>
-                  <a:srgbClr val="64738F"/>
-                </a:solidFill>
-                <a:latin typeface="Meiryo"/>
-              </a:defRPr>
-            </a:pPr>
-            <a:r>
-              <a:t>専門用語NG／値引き切り返し／結論から簡潔に／質問の意図</a:t>
-            </a:r>
-          </a:p>
-        </p:txBody>
-      </p:sp>
-      <p:sp>
-        <p:nvSpPr>
-          <p:cNvPr id="12" name="TextBox 11"/>
-          <p:cNvSpPr txBox="1"/>
-          <p:nvPr/>
-        </p:nvSpPr>
-        <p:spPr>
-          <a:xfrm>
-            <a:off x="640080" y="4443984"/>
-            <a:ext cx="1463040" cy="548640"/>
-          </a:xfrm>
-          <a:prstGeom prst="rect">
-            <a:avLst/>
-          </a:prstGeom>
-          <a:solidFill>
-            <a:srgbClr val="16305C"/>
-          </a:solidFill>
-        </p:spPr>
-        <p:txBody>
-          <a:bodyPr wrap="square">
-            <a:spAutoFit/>
-          </a:bodyPr>
-          <a:lstStyle/>
-          <a:p>
-            <a:pPr algn="ctr">
-              <a:defRPr sz="1800" b="1">
-                <a:solidFill>
-                  <a:srgbClr val="FFFFFF"/>
-                </a:solidFill>
-                <a:latin typeface="Meiryo"/>
-              </a:defRPr>
-            </a:pPr>
-            <a:r>
-              <a:t>STEP 4</a:t>
-            </a:r>
-          </a:p>
-        </p:txBody>
-      </p:sp>
-      <p:sp>
-        <p:nvSpPr>
-          <p:cNvPr id="13" name="TextBox 12"/>
-          <p:cNvSpPr txBox="1"/>
-          <p:nvPr/>
-        </p:nvSpPr>
-        <p:spPr>
-          <a:xfrm>
-            <a:off x="2286000" y="4443984"/>
-            <a:ext cx="3291840" cy="548640"/>
-          </a:xfrm>
-          <a:prstGeom prst="rect">
-            <a:avLst/>
-          </a:prstGeom>
-          <a:noFill/>
-        </p:spPr>
-        <p:txBody>
-          <a:bodyPr wrap="square">
-            <a:spAutoFit/>
-          </a:bodyPr>
-          <a:lstStyle/>
-          <a:p>
-            <a:pPr algn="l">
-              <a:defRPr sz="1900" b="1">
-                <a:solidFill>
-                  <a:srgbClr val="22314F"/>
-                </a:solidFill>
-                <a:latin typeface="Meiryo"/>
-              </a:defRPr>
-            </a:pPr>
-            <a:r>
-              <a:t>時間を選んで開始</a:t>
-            </a:r>
-          </a:p>
-        </p:txBody>
-      </p:sp>
-      <p:sp>
-        <p:nvSpPr>
-          <p:cNvPr id="14" name="TextBox 13"/>
-          <p:cNvSpPr txBox="1"/>
-          <p:nvPr/>
-        </p:nvSpPr>
-        <p:spPr>
-          <a:xfrm>
-            <a:off x="5669280" y="4443984"/>
-            <a:ext cx="5943600" cy="822960"/>
-          </a:xfrm>
-          <a:prstGeom prst="rect">
-            <a:avLst/>
-          </a:prstGeom>
-          <a:noFill/>
-        </p:spPr>
-        <p:txBody>
-          <a:bodyPr wrap="square">
-            <a:spAutoFit/>
-          </a:bodyPr>
-          <a:lstStyle/>
-          <a:p>
-            <a:pPr algn="l">
-              <a:defRPr sz="1400" b="0">
-                <a:solidFill>
-                  <a:srgbClr val="64738F"/>
-                </a:solidFill>
-                <a:latin typeface="Meiryo"/>
-              </a:defRPr>
-            </a:pPr>
-            <a:r>
-              <a:t>5〜20分。残り時間タイマー表示。マイクをタップして話すだけ</a:t>
-            </a:r>
-          </a:p>
-        </p:txBody>
-      </p:sp>
-      <p:sp>
-        <p:nvSpPr>
-          <p:cNvPr id="15" name="TextBox 14"/>
-          <p:cNvSpPr txBox="1"/>
-          <p:nvPr/>
-        </p:nvSpPr>
-        <p:spPr>
-          <a:xfrm>
-            <a:off x="640080" y="5468112"/>
-            <a:ext cx="1463040" cy="548640"/>
-          </a:xfrm>
-          <a:prstGeom prst="rect">
-            <a:avLst/>
-          </a:prstGeom>
-          <a:solidFill>
-            <a:srgbClr val="FF7A3C"/>
-          </a:solidFill>
-        </p:spPr>
-        <p:txBody>
-          <a:bodyPr wrap="square">
-            <a:spAutoFit/>
-          </a:bodyPr>
-          <a:lstStyle/>
-          <a:p>
-            <a:pPr algn="ctr">
-              <a:defRPr sz="1800" b="1">
-                <a:solidFill>
-                  <a:srgbClr val="FFFFFF"/>
-                </a:solidFill>
-                <a:latin typeface="Meiryo"/>
-              </a:defRPr>
-            </a:pPr>
-            <a:r>
-              <a:t>結果</a:t>
-            </a:r>
-          </a:p>
-        </p:txBody>
-      </p:sp>
-      <p:sp>
-        <p:nvSpPr>
-          <p:cNvPr id="16" name="TextBox 15"/>
-          <p:cNvSpPr txBox="1"/>
-          <p:nvPr/>
-        </p:nvSpPr>
-        <p:spPr>
-          <a:xfrm>
-            <a:off x="2286000" y="5468112"/>
-            <a:ext cx="3291840" cy="548640"/>
-          </a:xfrm>
-          <a:prstGeom prst="rect">
-            <a:avLst/>
-          </a:prstGeom>
-          <a:noFill/>
-        </p:spPr>
-        <p:txBody>
-          <a:bodyPr wrap="square">
-            <a:spAutoFit/>
-          </a:bodyPr>
-          <a:lstStyle/>
-          <a:p>
-            <a:pPr algn="l">
-              <a:defRPr sz="1900" b="1">
-                <a:solidFill>
-                  <a:srgbClr val="22314F"/>
-                </a:solidFill>
-                <a:latin typeface="Meiryo"/>
-              </a:defRPr>
-            </a:pPr>
-            <a:r>
-              <a:t>採点とフィードバック</a:t>
-            </a:r>
-          </a:p>
-        </p:txBody>
-      </p:sp>
-      <p:sp>
-        <p:nvSpPr>
-          <p:cNvPr id="17" name="TextBox 16"/>
-          <p:cNvSpPr txBox="1"/>
-          <p:nvPr/>
-        </p:nvSpPr>
-        <p:spPr>
-          <a:xfrm>
-            <a:off x="5669280" y="5468112"/>
-            <a:ext cx="5943600" cy="822960"/>
-          </a:xfrm>
-          <a:prstGeom prst="rect">
-            <a:avLst/>
-          </a:prstGeom>
-          <a:noFill/>
-        </p:spPr>
-        <p:txBody>
-          <a:bodyPr wrap="square">
-            <a:spAutoFit/>
-          </a:bodyPr>
-          <a:lstStyle/>
-          <a:p>
-            <a:pPr algn="l">
-              <a:defRPr sz="1400" b="0">
-                <a:solidFill>
-                  <a:srgbClr val="64738F"/>
-                </a:solidFill>
-                <a:latin typeface="Meiryo"/>
-              </a:defRPr>
-            </a:pPr>
-            <a:r>
-              <a:t>達成度◎○△×・良かった発言の引用・改善点1つ・スコアと称号</a:t>
+              <a:t>最初にマイクの許可を求められたら「許可」を押してください。</a:t>
             </a:r>
           </a:p>
         </p:txBody>
@@ -4594,8 +4205,8 @@
         </p:nvSpPr>
         <p:spPr>
           <a:xfrm>
-            <a:off x="640080" y="365760"/>
-            <a:ext cx="10972800" cy="822960"/>
+            <a:off x="457200" y="274320"/>
+            <a:ext cx="11247120" cy="640080"/>
           </a:xfrm>
           <a:prstGeom prst="rect">
             <a:avLst/>
@@ -4609,7 +4220,7 @@
           <a:lstStyle/>
           <a:p>
             <a:pPr algn="l">
-              <a:defRPr sz="3200" b="1">
+              <a:defRPr sz="2800" b="1">
                 <a:solidFill>
                   <a:srgbClr val="16305C"/>
                 </a:solidFill>
@@ -4617,21 +4228,69 @@
               </a:defRPr>
             </a:pPr>
             <a:r>
-              <a:t>音声のコツとトラブル対処</a:t>
-            </a:r>
-          </a:p>
-        </p:txBody>
-      </p:sp>
-      <p:sp>
-        <p:nvSpPr>
-          <p:cNvPr id="3" name="TextBox 2"/>
+              <a:t>ロープレ画面　マイクで話す/テキストで打つ、どちらでもOK</a:t>
+            </a:r>
+          </a:p>
+        </p:txBody>
+      </p:sp>
+      <p:pic>
+        <p:nvPicPr>
+          <p:cNvPr id="3" name="Picture 2" descr="5-play-voice.png"/>
+          <p:cNvPicPr>
+            <a:picLocks noChangeAspect="1"/>
+          </p:cNvPicPr>
+          <p:nvPr/>
+        </p:nvPicPr>
+        <p:blipFill>
+          <a:blip r:embed="rId2"/>
+          <a:stretch>
+            <a:fillRect/>
+          </a:stretch>
+        </p:blipFill>
+        <p:spPr>
+          <a:xfrm>
+            <a:off x="822960" y="868680"/>
+            <a:ext cx="2619691" cy="5669280"/>
+          </a:xfrm>
+          <a:prstGeom prst="rect">
+            <a:avLst/>
+          </a:prstGeom>
+        </p:spPr>
+      </p:pic>
+      <p:pic>
+        <p:nvPicPr>
+          <p:cNvPr id="4" name="Picture 3" descr="6-play-text.png"/>
+          <p:cNvPicPr>
+            <a:picLocks noChangeAspect="1"/>
+          </p:cNvPicPr>
+          <p:nvPr/>
+        </p:nvPicPr>
+        <p:blipFill>
+          <a:blip r:embed="rId3"/>
+          <a:stretch>
+            <a:fillRect/>
+          </a:stretch>
+        </p:blipFill>
+        <p:spPr>
+          <a:xfrm>
+            <a:off x="4206240" y="868680"/>
+            <a:ext cx="2619691" cy="5669280"/>
+          </a:xfrm>
+          <a:prstGeom prst="rect">
+            <a:avLst/>
+          </a:prstGeom>
+        </p:spPr>
+      </p:pic>
+      <p:sp>
+        <p:nvSpPr>
+          <p:cNvPr id="5" name="TextBox 4"/>
           <p:cNvSpPr txBox="1"/>
           <p:nvPr/>
         </p:nvSpPr>
         <p:spPr>
           <a:xfrm>
-            <a:off x="640080" y="1371600"/>
-            <a:ext cx="3840480" cy="548640"/>
+            <a:off x="7772400" y="1005840"/>
+            <a:ext cx="4023360" cy="548640"/>
           </a:xfrm>
           <a:prstGeom prst="rect">
             <a:avLst/>
@@ -4645,7 +4304,7 @@
           <a:lstStyle/>
           <a:p>
             <a:pPr algn="l">
-              <a:defRPr sz="1900" b="1">
+              <a:defRPr sz="2000" b="1">
                 <a:solidFill>
                   <a:srgbClr val="FF7A3C"/>
                 </a:solidFill>
@@ -4653,21 +4312,21 @@
               </a:defRPr>
             </a:pPr>
             <a:r>
-              <a:t>🎤 マイクの許可</a:t>
-            </a:r>
-          </a:p>
-        </p:txBody>
-      </p:sp>
-      <p:sp>
-        <p:nvSpPr>
-          <p:cNvPr id="4" name="TextBox 3"/>
+              <a:t>🎤 音声モード</a:t>
+            </a:r>
+          </a:p>
+        </p:txBody>
+      </p:sp>
+      <p:sp>
+        <p:nvSpPr>
+          <p:cNvPr id="6" name="TextBox 5"/>
           <p:cNvSpPr txBox="1"/>
           <p:nvPr/>
         </p:nvSpPr>
         <p:spPr>
           <a:xfrm>
-            <a:off x="4572000" y="1371600"/>
-            <a:ext cx="7040880" cy="822960"/>
+            <a:off x="7772400" y="1554480"/>
+            <a:ext cx="4023360" cy="1554480"/>
           </a:xfrm>
           <a:prstGeom prst="rect">
             <a:avLst/>
@@ -4681,7 +4340,7 @@
           <a:lstStyle/>
           <a:p>
             <a:pPr algn="l">
-              <a:defRPr sz="1500" b="0">
+              <a:defRPr sz="1400" b="0">
                 <a:solidFill>
                   <a:srgbClr val="22314F"/>
                 </a:solidFill>
@@ -4689,21 +4348,21 @@
               </a:defRPr>
             </a:pPr>
             <a:r>
-              <a:t>初回に「マイクを許可しますか」と出たら「許可」を選んでください。</a:t>
-            </a:r>
-          </a:p>
-        </p:txBody>
-      </p:sp>
-      <p:sp>
-        <p:nvSpPr>
-          <p:cNvPr id="5" name="TextBox 4"/>
+              <a:t>「タップして話す」を押してから話します。話し終えると事務長が音声で返答し、マイクは自動で再開します。上部に残り時間タイマーを常時表示。</a:t>
+            </a:r>
+          </a:p>
+        </p:txBody>
+      </p:sp>
+      <p:sp>
+        <p:nvSpPr>
+          <p:cNvPr id="7" name="TextBox 6"/>
           <p:cNvSpPr txBox="1"/>
           <p:nvPr/>
         </p:nvSpPr>
         <p:spPr>
           <a:xfrm>
-            <a:off x="640080" y="2377440"/>
-            <a:ext cx="3840480" cy="548640"/>
+            <a:off x="7772400" y="3291840"/>
+            <a:ext cx="4023360" cy="548640"/>
           </a:xfrm>
           <a:prstGeom prst="rect">
             <a:avLst/>
@@ -4717,7 +4376,7 @@
           <a:lstStyle/>
           <a:p>
             <a:pPr algn="l">
-              <a:defRPr sz="1900" b="1">
+              <a:defRPr sz="2000" b="1">
                 <a:solidFill>
                   <a:srgbClr val="FF7A3C"/>
                 </a:solidFill>
@@ -4725,21 +4384,21 @@
               </a:defRPr>
             </a:pPr>
             <a:r>
-              <a:t>🗣 話し方</a:t>
-            </a:r>
-          </a:p>
-        </p:txBody>
-      </p:sp>
-      <p:sp>
-        <p:nvSpPr>
-          <p:cNvPr id="6" name="TextBox 5"/>
+              <a:t>⌨️ テキストモード</a:t>
+            </a:r>
+          </a:p>
+        </p:txBody>
+      </p:sp>
+      <p:sp>
+        <p:nvSpPr>
+          <p:cNvPr id="8" name="TextBox 7"/>
           <p:cNvSpPr txBox="1"/>
           <p:nvPr/>
         </p:nvSpPr>
         <p:spPr>
           <a:xfrm>
-            <a:off x="4572000" y="2377440"/>
-            <a:ext cx="7040880" cy="822960"/>
+            <a:off x="7772400" y="3840480"/>
+            <a:ext cx="4023360" cy="1463040"/>
           </a:xfrm>
           <a:prstGeom prst="rect">
             <a:avLst/>
@@ -4753,7 +4412,7 @@
           <a:lstStyle/>
           <a:p>
             <a:pPr algn="l">
-              <a:defRPr sz="1500" b="0">
+              <a:defRPr sz="1400" b="0">
                 <a:solidFill>
                   <a:srgbClr val="22314F"/>
                 </a:solidFill>
@@ -4761,21 +4420,21 @@
               </a:defRPr>
             </a:pPr>
             <a:r>
-              <a:t>「タップして話す」を押してから話し、話し終わると自動で相手が返答します。</a:t>
-            </a:r>
-          </a:p>
-        </p:txBody>
-      </p:sp>
-      <p:sp>
-        <p:nvSpPr>
-          <p:cNvPr id="7" name="TextBox 6"/>
+              <a:t>騒がしい場所や聞き取りに失敗するときは「テキストに切替」。静かな場所では「読み上げOFF」で無音練習もできます。</a:t>
+            </a:r>
+          </a:p>
+        </p:txBody>
+      </p:sp>
+      <p:sp>
+        <p:nvSpPr>
+          <p:cNvPr id="9" name="TextBox 8"/>
           <p:cNvSpPr txBox="1"/>
           <p:nvPr/>
         </p:nvSpPr>
         <p:spPr>
           <a:xfrm>
-            <a:off x="640080" y="3383280"/>
-            <a:ext cx="3840480" cy="548640"/>
+            <a:off x="7772400" y="5394960"/>
+            <a:ext cx="4023360" cy="914400"/>
           </a:xfrm>
           <a:prstGeom prst="rect">
             <a:avLst/>
@@ -4789,195 +4448,15 @@
           <a:lstStyle/>
           <a:p>
             <a:pPr algn="l">
-              <a:defRPr sz="1900" b="1">
-                <a:solidFill>
-                  <a:srgbClr val="FF7A3C"/>
-                </a:solidFill>
-                <a:latin typeface="Meiryo"/>
-              </a:defRPr>
-            </a:pPr>
-            <a:r>
-              <a:t>⌨️ 聞き取れないとき</a:t>
-            </a:r>
-          </a:p>
-        </p:txBody>
-      </p:sp>
-      <p:sp>
-        <p:nvSpPr>
-          <p:cNvPr id="8" name="TextBox 7"/>
-          <p:cNvSpPr txBox="1"/>
-          <p:nvPr/>
-        </p:nvSpPr>
-        <p:spPr>
-          <a:xfrm>
-            <a:off x="4572000" y="3383280"/>
-            <a:ext cx="7040880" cy="822960"/>
-          </a:xfrm>
-          <a:prstGeom prst="rect">
-            <a:avLst/>
-          </a:prstGeom>
-          <a:noFill/>
-        </p:spPr>
-        <p:txBody>
-          <a:bodyPr wrap="square">
-            <a:spAutoFit/>
-          </a:bodyPr>
-          <a:lstStyle/>
-          <a:p>
-            <a:pPr algn="l">
-              <a:defRPr sz="1500" b="0">
-                <a:solidFill>
-                  <a:srgbClr val="22314F"/>
-                </a:solidFill>
-                <a:latin typeface="Meiryo"/>
-              </a:defRPr>
-            </a:pPr>
-            <a:r>
-              <a:t>「テキストに切替」でキーボード入力に変更できます。いつでも往復可能。</a:t>
-            </a:r>
-          </a:p>
-        </p:txBody>
-      </p:sp>
-      <p:sp>
-        <p:nvSpPr>
-          <p:cNvPr id="9" name="TextBox 8"/>
-          <p:cNvSpPr txBox="1"/>
-          <p:nvPr/>
-        </p:nvSpPr>
-        <p:spPr>
-          <a:xfrm>
-            <a:off x="640080" y="4389120"/>
-            <a:ext cx="3840480" cy="548640"/>
-          </a:xfrm>
-          <a:prstGeom prst="rect">
-            <a:avLst/>
-          </a:prstGeom>
-          <a:noFill/>
-        </p:spPr>
-        <p:txBody>
-          <a:bodyPr wrap="square">
-            <a:spAutoFit/>
-          </a:bodyPr>
-          <a:lstStyle/>
-          <a:p>
-            <a:pPr algn="l">
-              <a:defRPr sz="1900" b="1">
-                <a:solidFill>
-                  <a:srgbClr val="FF7A3C"/>
-                </a:solidFill>
-                <a:latin typeface="Meiryo"/>
-              </a:defRPr>
-            </a:pPr>
-            <a:r>
-              <a:t>🔇 静かな場所では</a:t>
-            </a:r>
-          </a:p>
-        </p:txBody>
-      </p:sp>
-      <p:sp>
-        <p:nvSpPr>
-          <p:cNvPr id="10" name="TextBox 9"/>
-          <p:cNvSpPr txBox="1"/>
-          <p:nvPr/>
-        </p:nvSpPr>
-        <p:spPr>
-          <a:xfrm>
-            <a:off x="4572000" y="4389120"/>
-            <a:ext cx="7040880" cy="822960"/>
-          </a:xfrm>
-          <a:prstGeom prst="rect">
-            <a:avLst/>
-          </a:prstGeom>
-          <a:noFill/>
-        </p:spPr>
-        <p:txBody>
-          <a:bodyPr wrap="square">
-            <a:spAutoFit/>
-          </a:bodyPr>
-          <a:lstStyle/>
-          <a:p>
-            <a:pPr algn="l">
-              <a:defRPr sz="1500" b="0">
-                <a:solidFill>
-                  <a:srgbClr val="22314F"/>
-                </a:solidFill>
-                <a:latin typeface="Meiryo"/>
-              </a:defRPr>
-            </a:pPr>
-            <a:r>
-              <a:t>「読み上げOFF」で音を出さずに練習できます(文字で会話)。</a:t>
-            </a:r>
-          </a:p>
-        </p:txBody>
-      </p:sp>
-      <p:sp>
-        <p:nvSpPr>
-          <p:cNvPr id="11" name="TextBox 10"/>
-          <p:cNvSpPr txBox="1"/>
-          <p:nvPr/>
-        </p:nvSpPr>
-        <p:spPr>
-          <a:xfrm>
-            <a:off x="640080" y="5394960"/>
-            <a:ext cx="3840480" cy="548640"/>
-          </a:xfrm>
-          <a:prstGeom prst="rect">
-            <a:avLst/>
-          </a:prstGeom>
-          <a:noFill/>
-        </p:spPr>
-        <p:txBody>
-          <a:bodyPr wrap="square">
-            <a:spAutoFit/>
-          </a:bodyPr>
-          <a:lstStyle/>
-          <a:p>
-            <a:pPr algn="l">
-              <a:defRPr sz="1900" b="1">
-                <a:solidFill>
-                  <a:srgbClr val="FF7A3C"/>
-                </a:solidFill>
-                <a:latin typeface="Meiryo"/>
-              </a:defRPr>
-            </a:pPr>
-            <a:r>
-              <a:t>📱 対応環境</a:t>
-            </a:r>
-          </a:p>
-        </p:txBody>
-      </p:sp>
-      <p:sp>
-        <p:nvSpPr>
-          <p:cNvPr id="12" name="TextBox 11"/>
-          <p:cNvSpPr txBox="1"/>
-          <p:nvPr/>
-        </p:nvSpPr>
-        <p:spPr>
-          <a:xfrm>
-            <a:off x="4572000" y="5394960"/>
-            <a:ext cx="7040880" cy="822960"/>
-          </a:xfrm>
-          <a:prstGeom prst="rect">
-            <a:avLst/>
-          </a:prstGeom>
-          <a:noFill/>
-        </p:spPr>
-        <p:txBody>
-          <a:bodyPr wrap="square">
-            <a:spAutoFit/>
-          </a:bodyPr>
-          <a:lstStyle/>
-          <a:p>
-            <a:pPr algn="l">
-              <a:defRPr sz="1500" b="0">
-                <a:solidFill>
-                  <a:srgbClr val="22314F"/>
-                </a:solidFill>
-                <a:latin typeface="Meiryo"/>
-              </a:defRPr>
-            </a:pPr>
-            <a:r>
-              <a:t>iPhoneはSafari、WindowsはChrome/Edgeを推奨。音声非対応ブラウザでは自動でテキストモードになります。</a:t>
+              <a:defRPr sz="1400" b="1">
+                <a:solidFill>
+                  <a:srgbClr val="16305C"/>
+                </a:solidFill>
+                <a:latin typeface="Meiryo"/>
+              </a:defRPr>
+            </a:pPr>
+            <a:r>
+              <a:t>⚠ 専門用語を使うと「それって何ですか？」と必ず聞き返されます。</a:t>
             </a:r>
           </a:p>
         </p:txBody>
@@ -4991,6 +4470,687 @@
 </file>
 
 <file path=ppt/slides/slide6.xml><?xml version="1.0" encoding="utf-8"?>
+<p:sld xmlns:a="http://schemas.openxmlformats.org/drawingml/2006/main" xmlns:p="http://schemas.openxmlformats.org/presentationml/2006/main" xmlns:r="http://schemas.openxmlformats.org/officeDocument/2006/relationships">
+  <p:cSld>
+    <p:bg>
+      <p:bgPr>
+        <a:solidFill>
+          <a:srgbClr val="FFFFFF"/>
+        </a:solidFill>
+        <a:effectLst/>
+      </p:bgPr>
+    </p:bg>
+    <p:spTree>
+      <p:nvGrpSpPr>
+        <p:cNvPr id="1" name=""/>
+        <p:cNvGrpSpPr/>
+        <p:nvPr/>
+      </p:nvGrpSpPr>
+      <p:grpSpPr/>
+      <p:sp>
+        <p:nvSpPr>
+          <p:cNvPr id="2" name="TextBox 1"/>
+          <p:cNvSpPr txBox="1"/>
+          <p:nvPr/>
+        </p:nvSpPr>
+        <p:spPr>
+          <a:xfrm>
+            <a:off x="457200" y="274320"/>
+            <a:ext cx="11247120" cy="640080"/>
+          </a:xfrm>
+          <a:prstGeom prst="rect">
+            <a:avLst/>
+          </a:prstGeom>
+          <a:noFill/>
+        </p:spPr>
+        <p:txBody>
+          <a:bodyPr wrap="square">
+            <a:spAutoFit/>
+          </a:bodyPr>
+          <a:lstStyle/>
+          <a:p>
+            <a:pPr algn="l">
+              <a:defRPr sz="2800" b="1">
+                <a:solidFill>
+                  <a:srgbClr val="16305C"/>
+                </a:solidFill>
+                <a:latin typeface="Meiryo"/>
+              </a:defRPr>
+            </a:pPr>
+            <a:r>
+              <a:t>結果画面　今日のテーマだけを採点、改善点は1つだけ</a:t>
+            </a:r>
+          </a:p>
+        </p:txBody>
+      </p:sp>
+      <p:pic>
+        <p:nvPicPr>
+          <p:cNvPr id="3" name="Picture 2" descr="7-result.png"/>
+          <p:cNvPicPr>
+            <a:picLocks noChangeAspect="1"/>
+          </p:cNvPicPr>
+          <p:nvPr/>
+        </p:nvPicPr>
+        <p:blipFill>
+          <a:blip r:embed="rId2"/>
+          <a:stretch>
+            <a:fillRect/>
+          </a:stretch>
+        </p:blipFill>
+        <p:spPr>
+          <a:xfrm>
+            <a:off x="1280160" y="868680"/>
+            <a:ext cx="2619691" cy="5669280"/>
+          </a:xfrm>
+          <a:prstGeom prst="rect">
+            <a:avLst/>
+          </a:prstGeom>
+        </p:spPr>
+      </p:pic>
+      <p:sp>
+        <p:nvSpPr>
+          <p:cNvPr id="4" name="TextBox 3"/>
+          <p:cNvSpPr txBox="1"/>
+          <p:nvPr/>
+        </p:nvSpPr>
+        <p:spPr>
+          <a:xfrm>
+            <a:off x="5120640" y="1097280"/>
+            <a:ext cx="6583680" cy="548640"/>
+          </a:xfrm>
+          <a:prstGeom prst="rect">
+            <a:avLst/>
+          </a:prstGeom>
+          <a:noFill/>
+        </p:spPr>
+        <p:txBody>
+          <a:bodyPr wrap="square">
+            <a:spAutoFit/>
+          </a:bodyPr>
+          <a:lstStyle/>
+          <a:p>
+            <a:pPr algn="l">
+              <a:defRPr sz="2000" b="1">
+                <a:solidFill>
+                  <a:srgbClr val="FF7A3C"/>
+                </a:solidFill>
+                <a:latin typeface="Meiryo"/>
+              </a:defRPr>
+            </a:pPr>
+            <a:r>
+              <a:t>結果の見かた</a:t>
+            </a:r>
+          </a:p>
+        </p:txBody>
+      </p:sp>
+      <p:sp>
+        <p:nvSpPr>
+          <p:cNvPr id="5" name="TextBox 4"/>
+          <p:cNvSpPr txBox="1"/>
+          <p:nvPr/>
+        </p:nvSpPr>
+        <p:spPr>
+          <a:xfrm>
+            <a:off x="5120640" y="1645920"/>
+            <a:ext cx="6583680" cy="3291840"/>
+          </a:xfrm>
+          <a:prstGeom prst="rect">
+            <a:avLst/>
+          </a:prstGeom>
+          <a:noFill/>
+        </p:spPr>
+        <p:txBody>
+          <a:bodyPr wrap="square">
+            <a:spAutoFit/>
+          </a:bodyPr>
+          <a:lstStyle/>
+          <a:p>
+            <a:pPr algn="l">
+              <a:defRPr sz="1500" b="0">
+                <a:solidFill>
+                  <a:srgbClr val="22314F"/>
+                </a:solidFill>
+                <a:latin typeface="Meiryo"/>
+              </a:defRPr>
+            </a:pPr>
+            <a:r>
+              <a:t>① テーマ達成度: ◎（85点以上）／○／△／×</a:t>
+            </a:r>
+          </a:p>
+          <a:p>
+            <a:pPr algn="l">
+              <a:defRPr sz="1500" b="0">
+                <a:solidFill>
+                  <a:srgbClr val="22314F"/>
+                </a:solidFill>
+                <a:latin typeface="Meiryo"/>
+              </a:defRPr>
+            </a:pPr>
+            <a:r>
+              <a:t>② スコアと称号: 「事務長攻略度100点: 事務長攻略マスター」など6段階</a:t>
+            </a:r>
+          </a:p>
+          <a:p>
+            <a:pPr algn="l">
+              <a:defRPr sz="1500" b="0">
+                <a:solidFill>
+                  <a:srgbClr val="22314F"/>
+                </a:solidFill>
+                <a:latin typeface="Meiryo"/>
+              </a:defRPr>
+            </a:pPr>
+            <a:r>
+              <a:t>③ 良かった発言: あなたの実際の発言を1つ引用</a:t>
+            </a:r>
+          </a:p>
+          <a:p>
+            <a:pPr algn="l">
+              <a:defRPr sz="1500" b="0">
+                <a:solidFill>
+                  <a:srgbClr val="22314F"/>
+                </a:solidFill>
+                <a:latin typeface="Meiryo"/>
+              </a:defRPr>
+            </a:pPr>
+            <a:r>
+              <a:t>④ 改善点: 1つだけ。すぐ使える言い換え例つき</a:t>
+            </a:r>
+          </a:p>
+          <a:p>
+            <a:pPr algn="l">
+              <a:defRPr sz="1500" b="0">
+                <a:solidFill>
+                  <a:srgbClr val="22314F"/>
+                </a:solidFill>
+                <a:latin typeface="Meiryo"/>
+              </a:defRPr>
+            </a:pPr>
+            <a:r>
+              <a:t>⑤ 記録: 通算回数・連続日数・自己ベストが自動で貯まります</a:t>
+            </a:r>
+          </a:p>
+        </p:txBody>
+      </p:sp>
+      <p:sp>
+        <p:nvSpPr>
+          <p:cNvPr id="6" name="TextBox 5"/>
+          <p:cNvSpPr txBox="1"/>
+          <p:nvPr/>
+        </p:nvSpPr>
+        <p:spPr>
+          <a:xfrm>
+            <a:off x="5120640" y="5029200"/>
+            <a:ext cx="6583680" cy="1097280"/>
+          </a:xfrm>
+          <a:prstGeom prst="rect">
+            <a:avLst/>
+          </a:prstGeom>
+          <a:noFill/>
+        </p:spPr>
+        <p:txBody>
+          <a:bodyPr wrap="square">
+            <a:spAutoFit/>
+          </a:bodyPr>
+          <a:lstStyle/>
+          <a:p>
+            <a:pPr algn="l">
+              <a:defRPr sz="1500" b="1">
+                <a:solidFill>
+                  <a:srgbClr val="16305C"/>
+                </a:solidFill>
+                <a:latin typeface="Meiryo"/>
+              </a:defRPr>
+            </a:pPr>
+            <a:r>
+              <a:t>「同じ条件でもう一度」で反復練習、「次のテーマへ」で別の力を鍛える。</a:t>
+            </a:r>
+          </a:p>
+          <a:p>
+            <a:pPr algn="l">
+              <a:defRPr sz="1500" b="1">
+                <a:solidFill>
+                  <a:srgbClr val="16305C"/>
+                </a:solidFill>
+                <a:latin typeface="Meiryo"/>
+              </a:defRPr>
+            </a:pPr>
+            <a:r>
+              <a:t>選んだテーマ以外（声のトーンなど）には一切言及しません。</a:t>
+            </a:r>
+          </a:p>
+        </p:txBody>
+      </p:sp>
+    </p:spTree>
+  </p:cSld>
+  <p:clrMapOvr>
+    <a:masterClrMapping/>
+  </p:clrMapOvr>
+</p:sld>
+</file>
+
+<file path=ppt/slides/slide7.xml><?xml version="1.0" encoding="utf-8"?>
+<p:sld xmlns:a="http://schemas.openxmlformats.org/drawingml/2006/main" xmlns:p="http://schemas.openxmlformats.org/presentationml/2006/main" xmlns:r="http://schemas.openxmlformats.org/officeDocument/2006/relationships">
+  <p:cSld>
+    <p:bg>
+      <p:bgPr>
+        <a:solidFill>
+          <a:srgbClr val="FFFFFF"/>
+        </a:solidFill>
+        <a:effectLst/>
+      </p:bgPr>
+    </p:bg>
+    <p:spTree>
+      <p:nvGrpSpPr>
+        <p:cNvPr id="1" name=""/>
+        <p:cNvGrpSpPr/>
+        <p:nvPr/>
+      </p:nvGrpSpPr>
+      <p:grpSpPr/>
+      <p:sp>
+        <p:nvSpPr>
+          <p:cNvPr id="2" name="TextBox 1"/>
+          <p:cNvSpPr txBox="1"/>
+          <p:nvPr/>
+        </p:nvSpPr>
+        <p:spPr>
+          <a:xfrm>
+            <a:off x="640080" y="365760"/>
+            <a:ext cx="10972800" cy="822960"/>
+          </a:xfrm>
+          <a:prstGeom prst="rect">
+            <a:avLst/>
+          </a:prstGeom>
+          <a:noFill/>
+        </p:spPr>
+        <p:txBody>
+          <a:bodyPr wrap="square">
+            <a:spAutoFit/>
+          </a:bodyPr>
+          <a:lstStyle/>
+          <a:p>
+            <a:pPr algn="l">
+              <a:defRPr sz="3000" b="1">
+                <a:solidFill>
+                  <a:srgbClr val="16305C"/>
+                </a:solidFill>
+                <a:latin typeface="Meiryo"/>
+              </a:defRPr>
+            </a:pPr>
+            <a:r>
+              <a:t>音声がうまく聞き取られないときは</a:t>
+            </a:r>
+          </a:p>
+        </p:txBody>
+      </p:sp>
+      <p:sp>
+        <p:nvSpPr>
+          <p:cNvPr id="3" name="TextBox 2"/>
+          <p:cNvSpPr txBox="1"/>
+          <p:nvPr/>
+        </p:nvSpPr>
+        <p:spPr>
+          <a:xfrm>
+            <a:off x="640080" y="1371600"/>
+            <a:ext cx="4206240" cy="548640"/>
+          </a:xfrm>
+          <a:prstGeom prst="rect">
+            <a:avLst/>
+          </a:prstGeom>
+          <a:noFill/>
+        </p:spPr>
+        <p:txBody>
+          <a:bodyPr wrap="square">
+            <a:spAutoFit/>
+          </a:bodyPr>
+          <a:lstStyle/>
+          <a:p>
+            <a:pPr algn="l">
+              <a:defRPr sz="1800" b="1">
+                <a:solidFill>
+                  <a:srgbClr val="FF7A3C"/>
+                </a:solidFill>
+                <a:latin typeface="Meiryo"/>
+              </a:defRPr>
+            </a:pPr>
+            <a:r>
+              <a:t>🎤 マイクの許可を確認</a:t>
+            </a:r>
+          </a:p>
+        </p:txBody>
+      </p:sp>
+      <p:sp>
+        <p:nvSpPr>
+          <p:cNvPr id="4" name="TextBox 3"/>
+          <p:cNvSpPr txBox="1"/>
+          <p:nvPr/>
+        </p:nvSpPr>
+        <p:spPr>
+          <a:xfrm>
+            <a:off x="4937760" y="1371600"/>
+            <a:ext cx="6675120" cy="822960"/>
+          </a:xfrm>
+          <a:prstGeom prst="rect">
+            <a:avLst/>
+          </a:prstGeom>
+          <a:noFill/>
+        </p:spPr>
+        <p:txBody>
+          <a:bodyPr wrap="square">
+            <a:spAutoFit/>
+          </a:bodyPr>
+          <a:lstStyle/>
+          <a:p>
+            <a:pPr algn="l">
+              <a:defRPr sz="1400" b="0">
+                <a:solidFill>
+                  <a:srgbClr val="22314F"/>
+                </a:solidFill>
+                <a:latin typeface="Meiryo"/>
+              </a:defRPr>
+            </a:pPr>
+            <a:r>
+              <a:t>初回の「マイクを許可しますか」で「許可」を選択。iPhoneは「設定 &gt; Siriと検索 &gt; 音声入力」もONに。</a:t>
+            </a:r>
+          </a:p>
+        </p:txBody>
+      </p:sp>
+      <p:sp>
+        <p:nvSpPr>
+          <p:cNvPr id="5" name="TextBox 4"/>
+          <p:cNvSpPr txBox="1"/>
+          <p:nvPr/>
+        </p:nvSpPr>
+        <p:spPr>
+          <a:xfrm>
+            <a:off x="640080" y="2377440"/>
+            <a:ext cx="4206240" cy="548640"/>
+          </a:xfrm>
+          <a:prstGeom prst="rect">
+            <a:avLst/>
+          </a:prstGeom>
+          <a:noFill/>
+        </p:spPr>
+        <p:txBody>
+          <a:bodyPr wrap="square">
+            <a:spAutoFit/>
+          </a:bodyPr>
+          <a:lstStyle/>
+          <a:p>
+            <a:pPr algn="l">
+              <a:defRPr sz="1800" b="1">
+                <a:solidFill>
+                  <a:srgbClr val="FF7A3C"/>
+                </a:solidFill>
+                <a:latin typeface="Meiryo"/>
+              </a:defRPr>
+            </a:pPr>
+            <a:r>
+              <a:t>🗣 ボタンを押してから一呼吸</a:t>
+            </a:r>
+          </a:p>
+        </p:txBody>
+      </p:sp>
+      <p:sp>
+        <p:nvSpPr>
+          <p:cNvPr id="6" name="TextBox 5"/>
+          <p:cNvSpPr txBox="1"/>
+          <p:nvPr/>
+        </p:nvSpPr>
+        <p:spPr>
+          <a:xfrm>
+            <a:off x="4937760" y="2377440"/>
+            <a:ext cx="6675120" cy="822960"/>
+          </a:xfrm>
+          <a:prstGeom prst="rect">
+            <a:avLst/>
+          </a:prstGeom>
+          <a:noFill/>
+        </p:spPr>
+        <p:txBody>
+          <a:bodyPr wrap="square">
+            <a:spAutoFit/>
+          </a:bodyPr>
+          <a:lstStyle/>
+          <a:p>
+            <a:pPr algn="l">
+              <a:defRPr sz="1400" b="0">
+                <a:solidFill>
+                  <a:srgbClr val="22314F"/>
+                </a:solidFill>
+                <a:latin typeface="Meiryo"/>
+              </a:defRPr>
+            </a:pPr>
+            <a:r>
+              <a:t>「タップして話す」を押して、少し間を置いてから話し始めると認識されやすくなります。</a:t>
+            </a:r>
+          </a:p>
+        </p:txBody>
+      </p:sp>
+      <p:sp>
+        <p:nvSpPr>
+          <p:cNvPr id="7" name="TextBox 6"/>
+          <p:cNvSpPr txBox="1"/>
+          <p:nvPr/>
+        </p:nvSpPr>
+        <p:spPr>
+          <a:xfrm>
+            <a:off x="640080" y="3383280"/>
+            <a:ext cx="4206240" cy="548640"/>
+          </a:xfrm>
+          <a:prstGeom prst="rect">
+            <a:avLst/>
+          </a:prstGeom>
+          <a:noFill/>
+        </p:spPr>
+        <p:txBody>
+          <a:bodyPr wrap="square">
+            <a:spAutoFit/>
+          </a:bodyPr>
+          <a:lstStyle/>
+          <a:p>
+            <a:pPr algn="l">
+              <a:defRPr sz="1800" b="1">
+                <a:solidFill>
+                  <a:srgbClr val="FF7A3C"/>
+                </a:solidFill>
+                <a:latin typeface="Meiryo"/>
+              </a:defRPr>
+            </a:pPr>
+            <a:r>
+              <a:t>👀 聞き取り中の文字を確認</a:t>
+            </a:r>
+          </a:p>
+        </p:txBody>
+      </p:sp>
+      <p:sp>
+        <p:nvSpPr>
+          <p:cNvPr id="8" name="TextBox 7"/>
+          <p:cNvSpPr txBox="1"/>
+          <p:nvPr/>
+        </p:nvSpPr>
+        <p:spPr>
+          <a:xfrm>
+            <a:off x="4937760" y="3383280"/>
+            <a:ext cx="6675120" cy="822960"/>
+          </a:xfrm>
+          <a:prstGeom prst="rect">
+            <a:avLst/>
+          </a:prstGeom>
+          <a:noFill/>
+        </p:spPr>
+        <p:txBody>
+          <a:bodyPr wrap="square">
+            <a:spAutoFit/>
+          </a:bodyPr>
+          <a:lstStyle/>
+          <a:p>
+            <a:pPr algn="l">
+              <a:defRPr sz="1400" b="0">
+                <a:solidFill>
+                  <a:srgbClr val="22314F"/>
+                </a:solidFill>
+                <a:latin typeface="Meiryo"/>
+              </a:defRPr>
+            </a:pPr>
+            <a:r>
+              <a:t>話している間、認識された言葉がマイクボタンに表示されます。表示されない場合は聞き取れていません。</a:t>
+            </a:r>
+          </a:p>
+        </p:txBody>
+      </p:sp>
+      <p:sp>
+        <p:nvSpPr>
+          <p:cNvPr id="9" name="TextBox 8"/>
+          <p:cNvSpPr txBox="1"/>
+          <p:nvPr/>
+        </p:nvSpPr>
+        <p:spPr>
+          <a:xfrm>
+            <a:off x="640080" y="4389120"/>
+            <a:ext cx="4206240" cy="548640"/>
+          </a:xfrm>
+          <a:prstGeom prst="rect">
+            <a:avLst/>
+          </a:prstGeom>
+          <a:noFill/>
+        </p:spPr>
+        <p:txBody>
+          <a:bodyPr wrap="square">
+            <a:spAutoFit/>
+          </a:bodyPr>
+          <a:lstStyle/>
+          <a:p>
+            <a:pPr algn="l">
+              <a:defRPr sz="1800" b="1">
+                <a:solidFill>
+                  <a:srgbClr val="FF7A3C"/>
+                </a:solidFill>
+                <a:latin typeface="Meiryo"/>
+              </a:defRPr>
+            </a:pPr>
+            <a:r>
+              <a:t>⌨️ テキスト入力に切替</a:t>
+            </a:r>
+          </a:p>
+        </p:txBody>
+      </p:sp>
+      <p:sp>
+        <p:nvSpPr>
+          <p:cNvPr id="10" name="TextBox 9"/>
+          <p:cNvSpPr txBox="1"/>
+          <p:nvPr/>
+        </p:nvSpPr>
+        <p:spPr>
+          <a:xfrm>
+            <a:off x="4937760" y="4389120"/>
+            <a:ext cx="6675120" cy="822960"/>
+          </a:xfrm>
+          <a:prstGeom prst="rect">
+            <a:avLst/>
+          </a:prstGeom>
+          <a:noFill/>
+        </p:spPr>
+        <p:txBody>
+          <a:bodyPr wrap="square">
+            <a:spAutoFit/>
+          </a:bodyPr>
+          <a:lstStyle/>
+          <a:p>
+            <a:pPr algn="l">
+              <a:defRPr sz="1400" b="0">
+                <a:solidFill>
+                  <a:srgbClr val="22314F"/>
+                </a:solidFill>
+                <a:latin typeface="Meiryo"/>
+              </a:defRPr>
+            </a:pPr>
+            <a:r>
+              <a:t>何度も失敗するときは「テキストに切替」でキーボード入力へ。いつでも音声に戻せます。</a:t>
+            </a:r>
+          </a:p>
+        </p:txBody>
+      </p:sp>
+      <p:sp>
+        <p:nvSpPr>
+          <p:cNvPr id="11" name="TextBox 10"/>
+          <p:cNvSpPr txBox="1"/>
+          <p:nvPr/>
+        </p:nvSpPr>
+        <p:spPr>
+          <a:xfrm>
+            <a:off x="640080" y="5394960"/>
+            <a:ext cx="4206240" cy="548640"/>
+          </a:xfrm>
+          <a:prstGeom prst="rect">
+            <a:avLst/>
+          </a:prstGeom>
+          <a:noFill/>
+        </p:spPr>
+        <p:txBody>
+          <a:bodyPr wrap="square">
+            <a:spAutoFit/>
+          </a:bodyPr>
+          <a:lstStyle/>
+          <a:p>
+            <a:pPr algn="l">
+              <a:defRPr sz="1800" b="1">
+                <a:solidFill>
+                  <a:srgbClr val="FF7A3C"/>
+                </a:solidFill>
+                <a:latin typeface="Meiryo"/>
+              </a:defRPr>
+            </a:pPr>
+            <a:r>
+              <a:t>📱 推奨ブラウザ</a:t>
+            </a:r>
+          </a:p>
+        </p:txBody>
+      </p:sp>
+      <p:sp>
+        <p:nvSpPr>
+          <p:cNvPr id="12" name="TextBox 11"/>
+          <p:cNvSpPr txBox="1"/>
+          <p:nvPr/>
+        </p:nvSpPr>
+        <p:spPr>
+          <a:xfrm>
+            <a:off x="4937760" y="5394960"/>
+            <a:ext cx="6675120" cy="822960"/>
+          </a:xfrm>
+          <a:prstGeom prst="rect">
+            <a:avLst/>
+          </a:prstGeom>
+          <a:noFill/>
+        </p:spPr>
+        <p:txBody>
+          <a:bodyPr wrap="square">
+            <a:spAutoFit/>
+          </a:bodyPr>
+          <a:lstStyle/>
+          <a:p>
+            <a:pPr algn="l">
+              <a:defRPr sz="1400" b="0">
+                <a:solidFill>
+                  <a:srgbClr val="22314F"/>
+                </a:solidFill>
+                <a:latin typeface="Meiryo"/>
+              </a:defRPr>
+            </a:pPr>
+            <a:r>
+              <a:t>iPhoneはSafari、WindowsはChrome/Edge。非対応ブラウザでは自動的にテキストモードになります。</a:t>
+            </a:r>
+          </a:p>
+        </p:txBody>
+      </p:sp>
+    </p:spTree>
+  </p:cSld>
+  <p:clrMapOvr>
+    <a:masterClrMapping/>
+  </p:clrMapOvr>
+</p:sld>
+</file>
+
+<file path=ppt/slides/slide8.xml><?xml version="1.0" encoding="utf-8"?>
 <p:sld xmlns:a="http://schemas.openxmlformats.org/drawingml/2006/main" xmlns:p="http://schemas.openxmlformats.org/presentationml/2006/main" xmlns:r="http://schemas.openxmlformats.org/officeDocument/2006/relationships">
   <p:cSld>
     <p:bg>
@@ -5031,7 +5191,7 @@
           <a:lstStyle/>
           <a:p>
             <a:pPr algn="l">
-              <a:defRPr sz="3200" b="1">
+              <a:defRPr sz="3000" b="1">
                 <a:solidFill>
                   <a:srgbClr val="FFFFFF"/>
                 </a:solidFill>
@@ -5103,7 +5263,7 @@
           <a:lstStyle/>
           <a:p>
             <a:pPr algn="l">
-              <a:defRPr sz="1600" b="0">
+              <a:defRPr sz="1700" b="0">
                 <a:solidFill>
                   <a:srgbClr val="FFFFFF"/>
                 </a:solidFill>
@@ -5111,7 +5271,7 @@
               </a:defRPr>
             </a:pPr>
             <a:r>
-              <a:t>シーン「製品説明」×「やさしい事務長」×テーマ「専門用語を使わない」×10分</a:t>
+              <a:t>「製品説明」×「やさしい事務長」×「専門用語を使わない」×10分</a:t>
             </a:r>
           </a:p>
         </p:txBody>
@@ -5175,7 +5335,7 @@
           <a:lstStyle/>
           <a:p>
             <a:pPr algn="l">
-              <a:defRPr sz="1600" b="0">
+              <a:defRPr sz="1700" b="0">
                 <a:solidFill>
                   <a:srgbClr val="FFFFFF"/>
                 </a:solidFill>
@@ -5183,7 +5343,7 @@
               </a:defRPr>
             </a:pPr>
             <a:r>
-              <a:t>シーン「価格提示」×「普通の事務長」×テーマ「価格以外の価値で切り返す」×10分</a:t>
+              <a:t>「価格提示」×「普通の事務長」×「価格以外の価値で切り返す」×10分</a:t>
             </a:r>
           </a:p>
         </p:txBody>
@@ -5247,7 +5407,7 @@
           <a:lstStyle/>
           <a:p>
             <a:pPr algn="l">
-              <a:defRPr sz="1600" b="0">
+              <a:defRPr sz="1700" b="0">
                 <a:solidFill>
                   <a:srgbClr val="FFFFFF"/>
                 </a:solidFill>
@@ -5255,7 +5415,7 @@
               </a:defRPr>
             </a:pPr>
             <a:r>
-              <a:t>シーン「クロージング」×「忙しくて怖い事務長」×テーマ「結論から簡潔に」×5分</a:t>
+              <a:t>「クロージング」×「忙しくて怖い事務長」×「結論から簡潔に」×5分</a:t>
             </a:r>
           </a:p>
         </p:txBody>
@@ -5291,7 +5451,7 @@
               </a:defRPr>
             </a:pPr>
             <a:r>
-              <a:t>目指せ「事務長攻略マスター」(90点以上)!</a:t>
+              <a:t>目指せ「事務長攻略マスター」（90点以上）!</a:t>
             </a:r>
           </a:p>
           <a:p>
